--- a/dist/초6/사회·역사/민주주의와경제/초6_사회·역사_민주주의와경제_01_국가기관의역할_학생용.pptx
+++ b/dist/초6/사회·역사/민주주의와경제/초6_사회·역사_민주주의와경제_01_국가기관의역할_학생용.pptx
@@ -119,13 +119,13 @@
   <p:extLst>
     <p:ext uri="{521415D9-36F7-43E2-AB2F-B90AF26B5E84}">
       <p14:sectionLst xmlns:p14="http://schemas.microsoft.com/office/powerpoint/2010/main">
-        <p14:section name="도입" id="{325ad3b1-dc9c-3f02-434e-f4e9466bb1eb}">
+        <p14:section name="도입" id="{a35917d4-c271-5eaa-e9cc-3d85915ffb6c}">
           <p14:sldIdLst>
             <p14:sldId id="256"/>
             <p14:sldId id="257"/>
           </p14:sldIdLst>
         </p14:section>
-        <p14:section name="개념" id="{4b352513-7818-03ee-063c-0267b91c8a53}">
+        <p14:section name="개념" id="{499d6d21-9a08-e2ab-d990-86eca205dc29}">
           <p14:sldIdLst>
             <p14:sldId id="258"/>
             <p14:sldId id="259"/>
@@ -133,7 +133,7 @@
             <p14:sldId id="262"/>
           </p14:sldIdLst>
         </p14:section>
-        <p14:section name="연습" id="{c948e228-330d-828a-2b28-31e122e2da0a}">
+        <p14:section name="연습" id="{ca8c0917-1fdf-f887-a949-b3c717dd4934}">
           <p14:sldIdLst>
             <p14:sldId id="260"/>
             <p14:sldId id="263"/>
@@ -141,23 +141,23 @@
             <p14:sldId id="265"/>
           </p14:sldIdLst>
         </p14:section>
-        <p14:section name="개념" id="{219c0acb-5f9b-0604-1807-4b06c8abeabe}">
+        <p14:section name="개념" id="{1160d239-b2d5-b0f6-2e80-84eab20be7a0}">
           <p14:sldIdLst/>
         </p14:section>
-        <p14:section name="연습" id="{80a550b8-50f9-7b3e-21d8-308e013598cc}">
+        <p14:section name="연습" id="{5a9d392c-4fe3-0210-f132-3c2bea653c01}">
           <p14:sldIdLst/>
         </p14:section>
-        <p14:section name="확인" id="{117f69f2-c8ec-6b78-162c-f54a43fac795}">
+        <p14:section name="확인" id="{da65a64a-febc-90f3-7929-c08124f365a7}">
           <p14:sldIdLst>
             <p14:sldId id="266"/>
           </p14:sldIdLst>
         </p14:section>
-        <p14:section name="정리" id="{346987a3-53e7-926b-3bda-9e2ddbf4fc74}">
+        <p14:section name="정리" id="{83a76050-accf-054c-edc6-9a1dae563b75}">
           <p14:sldIdLst>
             <p14:sldId id="267"/>
           </p14:sldIdLst>
         </p14:section>
-        <p14:section name="보충" id="{1a2718c5-ccb5-b536-506c-ca5abe4520f8}">
+        <p14:section name="보충" id="{be83674d-6a25-d9d1-9482-0d00c58474cd}">
           <p14:sldIdLst>
             <p14:sldId id="268"/>
           </p14:sldIdLst>
